--- a/IEP/t2-lesson3-bellwork-IEP-ANSWER-KEY.pptx
+++ b/IEP/t2-lesson3-bellwork-IEP-ANSWER-KEY.pptx
@@ -987,6 +987,40 @@
           </a:p>
         </p:txBody>
       </p:sp>
+      <p:sp>
+        <p:nvSpPr>
+          <p:cNvPr id="8" name="Slide Number 8"/>
+          <p:cNvSpPr txBox="1"/>
+          <p:nvPr/>
+        </p:nvSpPr>
+        <p:spPr>
+          <a:xfrm>
+            <a:off x="11277295" y="6611112"/>
+            <a:ext cx="685800" cy="201168"/>
+          </a:xfrm>
+          <a:prstGeom prst="rect">
+            <a:avLst/>
+          </a:prstGeom>
+          <a:noFill/>
+        </p:spPr>
+        <p:txBody>
+          <a:bodyPr wrap="none" lIns="0" tIns="0" rIns="0" bIns="0" anchor="b">
+            <a:noAutofit/>
+          </a:bodyPr>
+          <a:lstStyle/>
+          <a:p>
+            <a:pPr algn="r"/>
+            <a:fld id="{5C1A6E0B-3B1F-4D5E-9C7A-2F4B8D6E1A90}" type="slidenum">
+              <a:rPr lang="en-US" sz="1200" dirty="0">
+                <a:solidFill>
+                  <a:srgbClr val="5F6272"/>
+                </a:solidFill>
+              </a:rPr>
+              <a:t>1</a:t>
+            </a:fld>
+          </a:p>
+        </p:txBody>
+      </p:sp>
     </p:spTree>
   </p:cSld>
   <p:clrMapOvr>
@@ -1610,6 +1644,40 @@
           </a:p>
         </p:txBody>
       </p:sp>
+      <p:sp>
+        <p:nvSpPr>
+          <p:cNvPr id="16" name="Slide Number 16"/>
+          <p:cNvSpPr txBox="1"/>
+          <p:nvPr/>
+        </p:nvSpPr>
+        <p:spPr>
+          <a:xfrm>
+            <a:off x="11277295" y="6611112"/>
+            <a:ext cx="685800" cy="201168"/>
+          </a:xfrm>
+          <a:prstGeom prst="rect">
+            <a:avLst/>
+          </a:prstGeom>
+          <a:noFill/>
+        </p:spPr>
+        <p:txBody>
+          <a:bodyPr wrap="none" lIns="0" tIns="0" rIns="0" bIns="0" anchor="b">
+            <a:noAutofit/>
+          </a:bodyPr>
+          <a:lstStyle/>
+          <a:p>
+            <a:pPr algn="r"/>
+            <a:fld id="{5C1A6E0B-3B1F-4D5E-9C7A-2F4B8D6E1A90}" type="slidenum">
+              <a:rPr lang="en-US" sz="1200" dirty="0">
+                <a:solidFill>
+                  <a:srgbClr val="5F6272"/>
+                </a:solidFill>
+              </a:rPr>
+              <a:t>2</a:t>
+            </a:fld>
+          </a:p>
+        </p:txBody>
+      </p:sp>
     </p:spTree>
   </p:cSld>
   <p:clrMapOvr>
@@ -2233,6 +2301,40 @@
           </a:p>
         </p:txBody>
       </p:sp>
+      <p:sp>
+        <p:nvSpPr>
+          <p:cNvPr id="16" name="Slide Number 16"/>
+          <p:cNvSpPr txBox="1"/>
+          <p:nvPr/>
+        </p:nvSpPr>
+        <p:spPr>
+          <a:xfrm>
+            <a:off x="11277295" y="6611112"/>
+            <a:ext cx="685800" cy="201168"/>
+          </a:xfrm>
+          <a:prstGeom prst="rect">
+            <a:avLst/>
+          </a:prstGeom>
+          <a:noFill/>
+        </p:spPr>
+        <p:txBody>
+          <a:bodyPr wrap="none" lIns="0" tIns="0" rIns="0" bIns="0" anchor="b">
+            <a:noAutofit/>
+          </a:bodyPr>
+          <a:lstStyle/>
+          <a:p>
+            <a:pPr algn="r"/>
+            <a:fld id="{5C1A6E0B-3B1F-4D5E-9C7A-2F4B8D6E1A90}" type="slidenum">
+              <a:rPr lang="en-US" sz="1200" dirty="0">
+                <a:solidFill>
+                  <a:srgbClr val="5F6272"/>
+                </a:solidFill>
+              </a:rPr>
+              <a:t>3</a:t>
+            </a:fld>
+          </a:p>
+        </p:txBody>
+      </p:sp>
     </p:spTree>
   </p:cSld>
   <p:clrMapOvr>
@@ -2866,6 +2968,40 @@
           </a:p>
         </p:txBody>
       </p:sp>
+      <p:sp>
+        <p:nvSpPr>
+          <p:cNvPr id="16" name="Slide Number 16"/>
+          <p:cNvSpPr txBox="1"/>
+          <p:nvPr/>
+        </p:nvSpPr>
+        <p:spPr>
+          <a:xfrm>
+            <a:off x="11277295" y="6611112"/>
+            <a:ext cx="685800" cy="201168"/>
+          </a:xfrm>
+          <a:prstGeom prst="rect">
+            <a:avLst/>
+          </a:prstGeom>
+          <a:noFill/>
+        </p:spPr>
+        <p:txBody>
+          <a:bodyPr wrap="none" lIns="0" tIns="0" rIns="0" bIns="0" anchor="b">
+            <a:noAutofit/>
+          </a:bodyPr>
+          <a:lstStyle/>
+          <a:p>
+            <a:pPr algn="r"/>
+            <a:fld id="{5C1A6E0B-3B1F-4D5E-9C7A-2F4B8D6E1A90}" type="slidenum">
+              <a:rPr lang="en-US" sz="1200" dirty="0">
+                <a:solidFill>
+                  <a:srgbClr val="5F6272"/>
+                </a:solidFill>
+              </a:rPr>
+              <a:t>4</a:t>
+            </a:fld>
+          </a:p>
+        </p:txBody>
+      </p:sp>
     </p:spTree>
   </p:cSld>
   <p:clrMapOvr>
@@ -3496,6 +3632,40 @@
               <a:t xml:space="preserve">Topic 2 Lesson 3 Bell Work · IEP Version · Answer Key (teacher copy)</a:t>
             </a:r>
             <a:endParaRPr lang="en-US" sz="1125" dirty="0"/>
+          </a:p>
+        </p:txBody>
+      </p:sp>
+      <p:sp>
+        <p:nvSpPr>
+          <p:cNvPr id="16" name="Slide Number 16"/>
+          <p:cNvSpPr txBox="1"/>
+          <p:nvPr/>
+        </p:nvSpPr>
+        <p:spPr>
+          <a:xfrm>
+            <a:off x="11277295" y="6611112"/>
+            <a:ext cx="685800" cy="201168"/>
+          </a:xfrm>
+          <a:prstGeom prst="rect">
+            <a:avLst/>
+          </a:prstGeom>
+          <a:noFill/>
+        </p:spPr>
+        <p:txBody>
+          <a:bodyPr wrap="none" lIns="0" tIns="0" rIns="0" bIns="0" anchor="b">
+            <a:noAutofit/>
+          </a:bodyPr>
+          <a:lstStyle/>
+          <a:p>
+            <a:pPr algn="r"/>
+            <a:fld id="{5C1A6E0B-3B1F-4D5E-9C7A-2F4B8D6E1A90}" type="slidenum">
+              <a:rPr lang="en-US" sz="1200" dirty="0">
+                <a:solidFill>
+                  <a:srgbClr val="5F6272"/>
+                </a:solidFill>
+              </a:rPr>
+              <a:t>5</a:t>
+            </a:fld>
           </a:p>
         </p:txBody>
       </p:sp>

--- a/IEP/t2-lesson3-bellwork-IEP-ANSWER-KEY.pptx
+++ b/IEP/t2-lesson3-bellwork-IEP-ANSWER-KEY.pptx
@@ -1255,7 +1255,7 @@
         <p:spPr>
           <a:xfrm>
             <a:off x="685800" y="1707642"/>
-            <a:ext cx="2164019" cy="749808"/>
+            <a:ext cx="2164019" cy="1298448"/>
           </a:xfrm>
           <a:prstGeom prst="rect">
             <a:avLst/>
@@ -1299,7 +1299,7 @@
         <p:spPr>
           <a:xfrm>
             <a:off x="2849819" y="1707642"/>
-            <a:ext cx="4328038" cy="749808"/>
+            <a:ext cx="4328038" cy="1298448"/>
           </a:xfrm>
           <a:prstGeom prst="rect">
             <a:avLst/>
@@ -1343,7 +1343,7 @@
         <p:spPr>
           <a:xfrm>
             <a:off x="7177857" y="1707642"/>
-            <a:ext cx="4328038" cy="749808"/>
+            <a:ext cx="4328038" cy="1298448"/>
           </a:xfrm>
           <a:prstGeom prst="rect">
             <a:avLst/>
@@ -1391,7 +1391,7 @@
                 <a:latin typeface="Segoe UI"/>
                 <a:cs typeface="Segoe UI"/>
               </a:rPr>
-              <a:t xml:space="preserve">Flip the fraction: ⅔ · 3/2 = 1.</a:t>
+              <a:t xml:space="preserve">1. ⅔ has 2 on top and 3 on the bottom. Flip them: 3/2. 2. Check: ⅔ · 3/2 = 1.</a:t>
             </a:r>
             <a:endParaRPr lang="en-US" sz="1800" dirty="0"/>
           </a:p>
@@ -1405,7 +1405,7 @@
         </p:nvCxnSpPr>
         <p:spPr>
           <a:xfrm>
-            <a:off x="685800" y="2457450"/>
+            <a:off x="685800" y="3006090"/>
             <a:ext cx="10820095" cy="0"/>
           </a:xfrm>
           <a:prstGeom prst="line">
@@ -1426,7 +1426,7 @@
         </p:nvSpPr>
         <p:spPr>
           <a:xfrm>
-            <a:off x="685800" y="2457450"/>
+            <a:off x="685800" y="3006090"/>
             <a:ext cx="2164019" cy="1024128"/>
           </a:xfrm>
           <a:prstGeom prst="rect">
@@ -1480,7 +1480,7 @@
         </p:nvSpPr>
         <p:spPr>
           <a:xfrm>
-            <a:off x="2849819" y="2457450"/>
+            <a:off x="2849819" y="3006090"/>
             <a:ext cx="4328038" cy="1024128"/>
           </a:xfrm>
           <a:prstGeom prst="rect">
@@ -1524,7 +1524,7 @@
         </p:nvSpPr>
         <p:spPr>
           <a:xfrm>
-            <a:off x="7177857" y="2457450"/>
+            <a:off x="7177857" y="3006090"/>
             <a:ext cx="4328038" cy="1024128"/>
           </a:xfrm>
           <a:prstGeom prst="rect">
@@ -1573,7 +1573,7 @@
                 <a:latin typeface="Segoe UI"/>
                 <a:cs typeface="Segoe UI"/>
               </a:rPr>
-              <a:t xml:space="preserve">A 90° counterclockwise rotation maps (x, y) to (−y, x).</a:t>
+              <a:t xml:space="preserve">1. x = 8 and y = 5. 2. (−y, x) = (−5, 8).</a:t>
             </a:r>
             <a:endParaRPr lang="en-US" sz="1800" dirty="0"/>
           </a:p>
@@ -1587,7 +1587,7 @@
         </p:nvCxnSpPr>
         <p:spPr>
           <a:xfrm>
-            <a:off x="685800" y="3481578"/>
+            <a:off x="685800" y="4030218"/>
             <a:ext cx="10820095" cy="0"/>
           </a:xfrm>
           <a:prstGeom prst="line">
@@ -1912,7 +1912,7 @@
         <p:spPr>
           <a:xfrm>
             <a:off x="685800" y="1707642"/>
-            <a:ext cx="2164019" cy="749808"/>
+            <a:ext cx="2164019" cy="1298448"/>
           </a:xfrm>
           <a:prstGeom prst="rect">
             <a:avLst/>
@@ -1966,7 +1966,7 @@
         <p:spPr>
           <a:xfrm>
             <a:off x="2849819" y="1707642"/>
-            <a:ext cx="4328038" cy="749808"/>
+            <a:ext cx="4328038" cy="1298448"/>
           </a:xfrm>
           <a:prstGeom prst="rect">
             <a:avLst/>
@@ -2010,7 +2010,7 @@
         <p:spPr>
           <a:xfrm>
             <a:off x="7177857" y="1707642"/>
-            <a:ext cx="4328038" cy="749808"/>
+            <a:ext cx="4328038" cy="1298448"/>
           </a:xfrm>
           <a:prstGeom prst="rect">
             <a:avLst/>
@@ -2058,7 +2058,7 @@
                 <a:latin typeface="Segoe UI"/>
                 <a:cs typeface="Segoe UI"/>
               </a:rPr>
-              <a:t xml:space="preserve">Slope = (5 − 0) ÷ (8 − 0) = 5/8.</a:t>
+              <a:t xml:space="preserve">1. Subtract the y-values: 5 − 0 = 5. 2. Subtract the x-values: 8 − 0 = 8. 3. Divide: 5 ÷ 8 = 5/8.</a:t>
             </a:r>
             <a:endParaRPr lang="en-US" sz="1800" dirty="0"/>
           </a:p>
@@ -2072,7 +2072,7 @@
         </p:nvCxnSpPr>
         <p:spPr>
           <a:xfrm>
-            <a:off x="685800" y="2457450"/>
+            <a:off x="685800" y="3006090"/>
             <a:ext cx="10820095" cy="0"/>
           </a:xfrm>
           <a:prstGeom prst="line">
@@ -2093,8 +2093,8 @@
         </p:nvSpPr>
         <p:spPr>
           <a:xfrm>
-            <a:off x="685800" y="2457450"/>
-            <a:ext cx="2164019" cy="749808"/>
+            <a:off x="685800" y="3006090"/>
+            <a:ext cx="2164019" cy="1298448"/>
           </a:xfrm>
           <a:prstGeom prst="rect">
             <a:avLst/>
@@ -2137,8 +2137,8 @@
         </p:nvSpPr>
         <p:spPr>
           <a:xfrm>
-            <a:off x="2849819" y="2457450"/>
-            <a:ext cx="4328038" cy="749808"/>
+            <a:off x="2849819" y="3006090"/>
+            <a:ext cx="4328038" cy="1298448"/>
           </a:xfrm>
           <a:prstGeom prst="rect">
             <a:avLst/>
@@ -2181,8 +2181,8 @@
         </p:nvSpPr>
         <p:spPr>
           <a:xfrm>
-            <a:off x="7177857" y="2457450"/>
-            <a:ext cx="4328038" cy="749808"/>
+            <a:off x="7177857" y="3006090"/>
+            <a:ext cx="4328038" cy="1298448"/>
           </a:xfrm>
           <a:prstGeom prst="rect">
             <a:avLst/>
@@ -2230,7 +2230,7 @@
                 <a:latin typeface="Segoe UI"/>
                 <a:cs typeface="Segoe UI"/>
               </a:rPr>
-              <a:t xml:space="preserve">In y = mx + b, m = −3.</a:t>
+              <a:t xml:space="preserve">1. Match y = −3x + 5 to y = mx + b: m = −3 and b = 5. 2. The slope is −3.</a:t>
             </a:r>
             <a:endParaRPr lang="en-US" sz="1800" dirty="0"/>
           </a:p>
@@ -2244,7 +2244,7 @@
         </p:nvCxnSpPr>
         <p:spPr>
           <a:xfrm>
-            <a:off x="685800" y="3207258"/>
+            <a:off x="685800" y="4304538"/>
             <a:ext cx="10820095" cy="0"/>
           </a:xfrm>
           <a:prstGeom prst="line">
@@ -2715,7 +2715,7 @@
                 <a:latin typeface="Segoe UI"/>
                 <a:cs typeface="Segoe UI"/>
               </a:rPr>
-              <a:t xml:space="preserve">Perpendicular slopes are negative reciprocals: ⅔ · (−3/2) = −1.</a:t>
+              <a:t xml:space="preserve">1. Flip ⅔: 3/2. 2. Change the sign: −3/2. 3. Check: ⅔ · (−3/2) = −1.</a:t>
             </a:r>
             <a:endParaRPr lang="en-US" sz="1800" dirty="0"/>
           </a:p>
@@ -2751,7 +2751,7 @@
         <p:spPr>
           <a:xfrm>
             <a:off x="685800" y="2731770"/>
-            <a:ext cx="2164019" cy="1024128"/>
+            <a:ext cx="2164019" cy="1298448"/>
           </a:xfrm>
           <a:prstGeom prst="rect">
             <a:avLst/>
@@ -2805,7 +2805,7 @@
         <p:spPr>
           <a:xfrm>
             <a:off x="2849819" y="2731770"/>
-            <a:ext cx="4328038" cy="1024128"/>
+            <a:ext cx="4328038" cy="1298448"/>
           </a:xfrm>
           <a:prstGeom prst="rect">
             <a:avLst/>
@@ -2849,7 +2849,7 @@
         <p:spPr>
           <a:xfrm>
             <a:off x="7177857" y="2731770"/>
-            <a:ext cx="4328038" cy="1024128"/>
+            <a:ext cx="4328038" cy="1298448"/>
           </a:xfrm>
           <a:prstGeom prst="rect">
             <a:avLst/>
@@ -2897,7 +2897,7 @@
                 <a:latin typeface="Segoe UI"/>
                 <a:cs typeface="Segoe UI"/>
               </a:rPr>
-              <a:t xml:space="preserve">On a horizontal line y never changes, so the rise is 0.</a:t>
+              <a:t xml:space="preserve">1. A horizontal line is flat: it never goes up or down, so the rise is 0. 2. 0 ÷ run = 0. The slope is 0.</a:t>
             </a:r>
             <a:endParaRPr lang="en-US" sz="1800" dirty="0"/>
           </a:p>
@@ -2911,7 +2911,7 @@
         </p:nvCxnSpPr>
         <p:spPr>
           <a:xfrm>
-            <a:off x="685800" y="3755898"/>
+            <a:off x="685800" y="4030218"/>
             <a:ext cx="10820095" cy="0"/>
           </a:xfrm>
           <a:prstGeom prst="line">
@@ -3236,7 +3236,7 @@
         <p:spPr>
           <a:xfrm>
             <a:off x="685800" y="1707642"/>
-            <a:ext cx="2164019" cy="1024128"/>
+            <a:ext cx="2164019" cy="1298448"/>
           </a:xfrm>
           <a:prstGeom prst="rect">
             <a:avLst/>
@@ -3290,7 +3290,7 @@
         <p:spPr>
           <a:xfrm>
             <a:off x="2849819" y="1707642"/>
-            <a:ext cx="4328038" cy="1024128"/>
+            <a:ext cx="4328038" cy="1298448"/>
           </a:xfrm>
           <a:prstGeom prst="rect">
             <a:avLst/>
@@ -3334,7 +3334,7 @@
         <p:spPr>
           <a:xfrm>
             <a:off x="7177857" y="1707642"/>
-            <a:ext cx="4328038" cy="1024128"/>
+            <a:ext cx="4328038" cy="1298448"/>
           </a:xfrm>
           <a:prstGeom prst="rect">
             <a:avLst/>
@@ -3382,7 +3382,7 @@
                 <a:latin typeface="Segoe UI"/>
                 <a:cs typeface="Segoe UI"/>
               </a:rPr>
-              <a:t xml:space="preserve">Every point on a vertical line has the same x-value, here 2.</a:t>
+              <a:t xml:space="preserve">1. On a vertical line, x never changes. 2. The point has x = 2, so the line is x = 2.</a:t>
             </a:r>
             <a:endParaRPr lang="en-US" sz="1800" dirty="0"/>
           </a:p>
@@ -3396,7 +3396,7 @@
         </p:nvCxnSpPr>
         <p:spPr>
           <a:xfrm>
-            <a:off x="685800" y="2731770"/>
+            <a:off x="685800" y="3006090"/>
             <a:ext cx="10820095" cy="0"/>
           </a:xfrm>
           <a:prstGeom prst="line">
@@ -3417,8 +3417,8 @@
         </p:nvSpPr>
         <p:spPr>
           <a:xfrm>
-            <a:off x="685800" y="2731770"/>
-            <a:ext cx="2164019" cy="1024128"/>
+            <a:off x="685800" y="3006090"/>
+            <a:ext cx="2164019" cy="1298448"/>
           </a:xfrm>
           <a:prstGeom prst="rect">
             <a:avLst/>
@@ -3471,8 +3471,8 @@
         </p:nvSpPr>
         <p:spPr>
           <a:xfrm>
-            <a:off x="2849819" y="2731770"/>
-            <a:ext cx="4328038" cy="1024128"/>
+            <a:off x="2849819" y="3006090"/>
+            <a:ext cx="4328038" cy="1298448"/>
           </a:xfrm>
           <a:prstGeom prst="rect">
             <a:avLst/>
@@ -3515,8 +3515,8 @@
         </p:nvSpPr>
         <p:spPr>
           <a:xfrm>
-            <a:off x="7177857" y="2731770"/>
-            <a:ext cx="4328038" cy="1024128"/>
+            <a:off x="7177857" y="3006090"/>
+            <a:ext cx="4328038" cy="1298448"/>
           </a:xfrm>
           <a:prstGeom prst="rect">
             <a:avLst/>
@@ -3564,7 +3564,7 @@
                 <a:latin typeface="Segoe UI"/>
                 <a:cs typeface="Segoe UI"/>
               </a:rPr>
-              <a:t xml:space="preserve">Negative reciprocals multiply to −1.</a:t>
+              <a:t xml:space="preserve">1. Example: slopes 2 and −½ are perpendicular. 2. 2 · (−½) = −1. The product is always −1.</a:t>
             </a:r>
             <a:endParaRPr lang="en-US" sz="1800" dirty="0"/>
           </a:p>
@@ -3578,7 +3578,7 @@
         </p:nvCxnSpPr>
         <p:spPr>
           <a:xfrm>
-            <a:off x="685800" y="3755898"/>
+            <a:off x="685800" y="4304538"/>
             <a:ext cx="10820095" cy="0"/>
           </a:xfrm>
           <a:prstGeom prst="line">

--- a/IEP/t2-lesson3-bellwork-IEP-ANSWER-KEY.pptx
+++ b/IEP/t2-lesson3-bellwork-IEP-ANSWER-KEY.pptx
@@ -2094,7 +2094,7 @@
         <p:spPr>
           <a:xfrm>
             <a:off x="685800" y="3006090"/>
-            <a:ext cx="2164019" cy="1298448"/>
+            <a:ext cx="2164019" cy="1847088"/>
           </a:xfrm>
           <a:prstGeom prst="rect">
             <a:avLst/>
@@ -2138,7 +2138,7 @@
         <p:spPr>
           <a:xfrm>
             <a:off x="2849819" y="3006090"/>
-            <a:ext cx="4328038" cy="1298448"/>
+            <a:ext cx="4328038" cy="1847088"/>
           </a:xfrm>
           <a:prstGeom prst="rect">
             <a:avLst/>
@@ -2167,7 +2167,7 @@
                 <a:latin typeface="Segoe UI"/>
                 <a:cs typeface="Segoe UI"/>
               </a:rPr>
-              <a:t xml:space="preserve">What is the slope of y = −3x + 5?</a:t>
+              <a:t xml:space="preserve">A line passes through the points (−1, 4) and (2, −2). What is the slope of the line?</a:t>
             </a:r>
             <a:endParaRPr lang="en-US" sz="1800" dirty="0"/>
           </a:p>
@@ -2182,7 +2182,7 @@
         <p:spPr>
           <a:xfrm>
             <a:off x="7177857" y="3006090"/>
-            <a:ext cx="4328038" cy="1298448"/>
+            <a:ext cx="4328038" cy="1847088"/>
           </a:xfrm>
           <a:prstGeom prst="rect">
             <a:avLst/>
@@ -2211,7 +2211,7 @@
                 <a:latin typeface="Segoe UI"/>
                 <a:cs typeface="Segoe UI"/>
               </a:rPr>
-              <a:t xml:space="preserve">−3</a:t>
+              <a:t xml:space="preserve">−2</a:t>
             </a:r>
             <a:br>
               <a:rPr lang="en-US" sz="1800" dirty="0">
@@ -2230,7 +2230,7 @@
                 <a:latin typeface="Segoe UI"/>
                 <a:cs typeface="Segoe UI"/>
               </a:rPr>
-              <a:t xml:space="preserve">1. Match y = −3x + 5 to y = mx + b: m = −3 and b = 5. 2. The slope is −3.</a:t>
+              <a:t xml:space="preserve">1. Label the points: (x₁, y₁) = (−1, 4) and (x₂, y₂) = (2, −2). 2. Subtract the y-values: −2 − 4 = −6. Subtract the x-values: 2 − (−1) = 3. 3. Divide: −6 ÷ 3 = −2.</a:t>
             </a:r>
             <a:endParaRPr lang="en-US" sz="1800" dirty="0"/>
           </a:p>
@@ -2244,7 +2244,7 @@
         </p:nvCxnSpPr>
         <p:spPr>
           <a:xfrm>
-            <a:off x="685800" y="4304538"/>
+            <a:off x="685800" y="4853178"/>
             <a:ext cx="10820095" cy="0"/>
           </a:xfrm>
           <a:prstGeom prst="line">
@@ -3418,7 +3418,7 @@
         <p:spPr>
           <a:xfrm>
             <a:off x="685800" y="3006090"/>
-            <a:ext cx="2164019" cy="1298448"/>
+            <a:ext cx="2164019" cy="1572768"/>
           </a:xfrm>
           <a:prstGeom prst="rect">
             <a:avLst/>
@@ -3457,7 +3457,7 @@
                 <a:latin typeface="Segoe UI"/>
                 <a:cs typeface="Segoe UI"/>
               </a:rPr>
-              <a:t xml:space="preserve"> · SE p. 308</a:t>
+              <a:t xml:space="preserve"> · SE p. 312</a:t>
             </a:r>
             <a:endParaRPr lang="en-US" sz="1800" dirty="0"/>
           </a:p>
@@ -3472,7 +3472,7 @@
         <p:spPr>
           <a:xfrm>
             <a:off x="2849819" y="3006090"/>
-            <a:ext cx="4328038" cy="1298448"/>
+            <a:ext cx="4328038" cy="1572768"/>
           </a:xfrm>
           <a:prstGeom prst="rect">
             <a:avLst/>
@@ -3501,7 +3501,7 @@
                 <a:latin typeface="Segoe UI"/>
                 <a:cs typeface="Segoe UI"/>
               </a:rPr>
-              <a:t xml:space="preserve">What is the product of the slopes of two perpendicular lines (neither vertical)?</a:t>
+              <a:t xml:space="preserve">Which equation represents a line perpendicular to y = 2x + 3 that passes through the point (4, 1)?</a:t>
             </a:r>
             <a:endParaRPr lang="en-US" sz="1800" dirty="0"/>
           </a:p>
@@ -3516,7 +3516,7 @@
         <p:spPr>
           <a:xfrm>
             <a:off x="7177857" y="3006090"/>
-            <a:ext cx="4328038" cy="1298448"/>
+            <a:ext cx="4328038" cy="1572768"/>
           </a:xfrm>
           <a:prstGeom prst="rect">
             <a:avLst/>
@@ -3545,7 +3545,7 @@
                 <a:latin typeface="Segoe UI"/>
                 <a:cs typeface="Segoe UI"/>
               </a:rPr>
-              <a:t xml:space="preserve">−1</a:t>
+              <a:t xml:space="preserve">y = −½x + 3</a:t>
             </a:r>
             <a:br>
               <a:rPr lang="en-US" sz="1800" dirty="0">
@@ -3564,7 +3564,7 @@
                 <a:latin typeface="Segoe UI"/>
                 <a:cs typeface="Segoe UI"/>
               </a:rPr>
-              <a:t xml:space="preserve">1. Example: slopes 2 and −½ are perpendicular. 2. 2 · (−½) = −1. The product is always −1.</a:t>
+              <a:t xml:space="preserve">1. Slope of y = 2x + 3 is 2. Flip and change the sign: −½. 2. Put in (4, 1): 1 = −½(4) + b = −2 + b. 3. b = 3: y = −½x + 3.</a:t>
             </a:r>
             <a:endParaRPr lang="en-US" sz="1800" dirty="0"/>
           </a:p>
@@ -3578,7 +3578,7 @@
         </p:nvCxnSpPr>
         <p:spPr>
           <a:xfrm>
-            <a:off x="685800" y="4304538"/>
+            <a:off x="685800" y="4578858"/>
             <a:ext cx="10820095" cy="0"/>
           </a:xfrm>
           <a:prstGeom prst="line">
